--- a/aulas/desenvolvimento-normal-2-anos-puberdade/deck/Satelites_Desenvolvimento-normal_PsiquiatriaPratica.pptx
+++ b/aulas/desenvolvimento-normal-2-anos-puberdade/deck/Satelites_Desenvolvimento-normal_PsiquiatriaPratica.pptx
@@ -16029,7 +16029,7 @@
               <a:buNone/>
             </a:pPr>
             <a:r>
-              <a:rPr lang="en-US" sz="1350" i="1" dirty="0">
+              <a:rPr lang="en-US" sz="1300" i="1" dirty="0">
                 <a:solidFill>
                   <a:srgbClr val="56365F"/>
                 </a:solidFill>
@@ -16037,9 +16037,9 @@
                 <a:ea typeface="Calibri" pitchFamily="34" charset="-122"/>
                 <a:cs typeface="Calibri" pitchFamily="34" charset="-120"/>
               </a:rPr>
-              <a:t>A cena (do vídeo da aula): criança de ~2 anos pede doce no caixa; mãe diz não; grito e chão; após 90 segundos, a mãe entrega o doce e o grito para.</a:t>
-            </a:r>
-            <a:endParaRPr lang="en-US" sz="1350" dirty="0"/>
+              <a:t>A cena-tipo (padrão do vídeo V2 da aula; confirme que o clipe escolhido contém o ciclo completo): criança de ~2 anos pede doce no caixa; mãe diz não; grito e chão; a mãe entrega o doce e o grito para.</a:t>
+            </a:r>
+            <a:endParaRPr lang="en-US" sz="1300" dirty="0"/>
           </a:p>
         </p:txBody>
       </p:sp>
